--- a/report/정안성_HW1_8bit_adder.pptx
+++ b/report/정안성_HW1_8bit_adder.pptx
@@ -12140,7 +12140,7 @@
               <a:buNone/>
             </a:pPr>
             <a:r>
-              <a:rPr lang="en-US" sz="2600" b="1" dirty="0">
+              <a:rPr lang="en-US" sz="2600" b="1">
                 <a:solidFill>
                   <a:srgbClr val="1F2937"/>
                 </a:solidFill>
@@ -12148,7 +12148,18 @@
                 <a:ea typeface="Malgun Gothic" pitchFamily="34" charset="-122"/>
                 <a:cs typeface="Malgun Gothic" pitchFamily="34" charset="-120"/>
               </a:rPr>
-              <a:t>8-bit Adder는 전 입력에서 정답, 보드에서도 정상 동작</a:t>
+              <a:t>8-bit Full Adder</a:t>
+            </a:r>
+            <a:r>
+              <a:rPr lang="en-US" sz="2600" b="1" dirty="0">
+                <a:solidFill>
+                  <a:srgbClr val="1F2937"/>
+                </a:solidFill>
+                <a:latin typeface="Malgun Gothic" pitchFamily="34" charset="0"/>
+                <a:ea typeface="Malgun Gothic" pitchFamily="34" charset="-122"/>
+                <a:cs typeface="Malgun Gothic" pitchFamily="34" charset="-120"/>
+              </a:rPr>
+              <a:t>는 전 입력에서 정답, 보드에서도 정상 동작</a:t>
             </a:r>
             <a:endParaRPr lang="en-US" sz="2600" dirty="0"/>
           </a:p>
